--- a/decks/hist-british-empire-india/hist-british-empire-india_ch1_empire-and-company.pptx
+++ b/decks/hist-british-empire-india/hist-british-empire-india_ch1_empire-and-company.pptx
@@ -128,31 +128,31 @@
   <p:extLst>
     <p:ext uri="{521415D9-36F7-43E2-AB2F-B90AF26B5E84}">
       <p14:sectionLst xmlns:p14="http://schemas.microsoft.com/office/powerpoint/2010/main">
-        <p14:section name="Opening" id="{76725b07-101d-f77d-ced4-a771c7a5a3ea}">
+        <p14:section name="Opening" id="{5695dcaf-78b0-1da8-8f0a-400354173039}">
           <p14:sldIdLst>
             <p14:sldId id="256"/>
           </p14:sldIdLst>
         </p14:section>
-        <p14:section name="Gate" id="{a3614fe1-810e-644c-0a81-c660cc5f5b7b}">
+        <p14:section name="Gate" id="{800552ce-cec6-ee71-2641-fd81035dcd03}">
           <p14:sldIdLst>
             <p14:sldId id="257"/>
             <p14:sldId id="258"/>
             <p14:sldId id="259"/>
           </p14:sldIdLst>
         </p14:section>
-        <p14:section name="Pre-teach" id="{7fbbe7f9-1ea1-d7c7-f6ad-b274516bd8fe}">
+        <p14:section name="Pre-teach" id="{be9f1375-48af-86e8-9bfc-56f434515d34}">
           <p14:sldIdLst>
             <p14:sldId id="260"/>
             <p14:sldId id="261"/>
           </p14:sldIdLst>
         </p14:section>
-        <p14:section name="Read-along" id="{4f5ca55f-5fad-3ec6-2a5c-f89f352f7d9c}">
+        <p14:section name="Read-along" id="{70e1caaf-0d72-ff64-3e7e-c23d6632a75d}">
           <p14:sldIdLst>
             <p14:sldId id="262"/>
             <p14:sldId id="263"/>
           </p14:sldIdLst>
         </p14:section>
-        <p14:section name="Teach" id="{d24f4f6a-05a2-108e-e7b0-c49d52ddfe2c}">
+        <p14:section name="Teach" id="{6b8162a0-83fb-78e6-0e9c-959cfac5ba11}">
           <p14:sldIdLst>
             <p14:sldId id="264"/>
             <p14:sldId id="265"/>
@@ -162,7 +162,7 @@
             <p14:sldId id="269"/>
           </p14:sldIdLst>
         </p14:section>
-        <p14:section name="Routes" id="{2c03071f-4a14-a16b-8012-52295e7667fe}">
+        <p14:section name="Routes" id="{2c50b210-9a23-cb6c-c7e1-9f6d9585e325}">
           <p14:sldIdLst>
             <p14:sldId id="270"/>
             <p14:sldId id="271"/>
@@ -170,12 +170,12 @@
             <p14:sldId id="273"/>
           </p14:sldIdLst>
         </p14:section>
-        <p14:section name="Close" id="{26617d59-f98d-a005-ade9-796f459fd767}">
+        <p14:section name="Close" id="{b612b797-4cb0-5c3a-f773-ed8c57a02897}">
           <p14:sldIdLst>
             <p14:sldId id="274"/>
           </p14:sldIdLst>
         </p14:section>
-        <p14:section name="Answers" id="{973b8f80-d83f-7021-1c90-eda8e09a5609}">
+        <p14:section name="Answers" id="{fff4ec15-4116-f7b9-1e86-0a8a1b716765}">
           <p14:sldIdLst>
             <p14:sldId id="275"/>
             <p14:sldId id="276"/>
@@ -770,7 +770,7 @@
             <a:r>
               <a:rPr lang="en-US" dirty="0"/>
               <a:t>Teach — The Mughals and the Company, 1600–1720. Say it in your own words, then check understanding with a quick question: ask a pupil from the pre-teach group first, since they met these words and ideas before the lesson. Pupils try to recall before you re-explain.
-When the Company arrived, India was ruled by the Mughal Empire, which you studied in Year 7. By 1700 the Mughal Empire covered nearly all of India and was one of the richest countries on the planet under its last great emperor, Aurangzeb. The Company did not invade or conquer India in the 1600s. Instead, Mughal emperors gave it permission to trade as long as it paid taxes and supplied European goods. In 1634 the Emperor Shah Jahan extended the agreement to cover an even bigger part of India. For both sides this was a happy arrangement: the Company made money and the Mughals received taxes and goods.
+When the Company arrived, India was ruled by the Mughal Empire, which you studied in Year 7. By 1700 the Mughal Empire covered nearly all of India, and under its last great emperor, Aurangzeb, it was among the richest countries in the world. The Company did not invade or conquer India in the 1600s. Instead, Mughal emperors gave it permission to trade as long as it paid taxes and supplied European goods. In 1634 the Emperor Shah Jahan extended the agreement to cover an even bigger part of India. For both sides this was a happy arrangement: the Company made money and the Mughals received taxes and goods.
 This changed in 1707, when Aurangzeb died. His family fought for control of the Empire, which weakened and divided it. By 1720 the Mughal Empire had collapsed. India became a collection of smaller states ruled by Nawabs, Indian princes. With no strong emperor, the East India Company was now the most powerful group in India.
 To protect its business the Company built up its private army and made agreements with the local Nawabs: it paid taxes to a Nawab in return for the right to trade in his region. One of these agreements was with the Nawab of Bengal, who set rules and taxes for the Company to follow.
 Tip: Notice the pattern: while the Mughals were strong, someone could make the Company follow rules. Remember that when you reach Company rule in chapter 2.</a:t>
@@ -863,7 +863,7 @@
               <a:rPr lang="en-US" dirty="0"/>
               <a:t>Teach — The Battle of Plassey, 1757: from traders to rulers. Say it in your own words, then check understanding with a quick question: ask a pupil from the pre-teach group first, since they met these words and ideas before the lesson. Pupils try to recall before you re-explain.
 In 1756 the Nawab of Bengal, Siraj ud-Daulah, attacked the Company's base at Calcutta. He accused the Company of breaking his rules and of not paying the taxes it owed him. The Company sent Robert Clive to Calcutta to defeat the Nawab and secure its position.
-In 1757 Clive faced the Nawab at the Battle of Plassey. Clive had only about 3,000 men; the Nawab had about 40,000, with support from France. But Clive used a divide and rule strategy. In secret, he offered the Nawab's key military officers money and positions of power if they did not fight. Most of the Nawab's soldiers refused to fight, and Clive won easily. Clive then used his victory to make himself rich: your lesson says he took the equivalent of £250 million in today's money from the Nawab and from Bengal, and carried precious jewels back to England.
+In 1757 Clive faced the Nawab at the Battle of Plassey. Clive had only about 3,000 men; the Nawab had about 40,000, with support from France. But Clive used a divide and rule strategy. In secret, he offered the Nawab's key military officers money and positions of power if they did not fight. Most of the Nawab's soldiers refused to fight, and Clive won easily. Clive then used his victory to make himself rich: your lesson says he took from the Nawab and from Bengal the equivalent of £250 million in today's money, and carried precious jewels home to England.
 Plassey was a turning point. The Company officially took control of Bengal and changed from a business focused on trade and profit into the ruler of a large part of India. In 1765 it took charge of all tax collection in Bengal, a job that belongs to rulers, not to private companies. In the years that followed it used its private army and the same divide and rule strategy to take control of most of India. The British Empire in India had begun.
 Worked example — model it step by step, thinking aloud: Explain why India was ‘easy’ to conquer in 1757. Refer to Aurangzeb and to what happened after his death. (1) Point: India was easy to conquer in 1757 because the Mughal Empire that had held it together had collapsed. (2) Evidence: after Aurangzeb died in 1707 his family fought for control, and by 1720 the Empire had broken into smaller states ruled by Nawabs. (3) Explain: a divided India could not unite against the Company, and Clive could use divide and rule, paying the Nawab's own officers not to fight at Plassey. (4) Link: so the Company did not need a huge army; India's division did much of the work for it. Answer: Point, evidence, explain, link: the Mughal collapse after 1707 left India divided into Nawab-ruled states, so the Company could pick them off one at a time and buy off the Nawab's officers at Plassey..
 Tip: Divide and rule appears three times in this unit: Plassey in 1757, the partition of Bengal in 1905, and the use of caste and religion under the Raj. Keep a running list.</a:t>
@@ -956,7 +956,7 @@
               <a:rPr lang="en-US" dirty="0"/>
               <a:t>Teach — The Battle of Plassey, 1757: from traders to rulers. Say it in your own words, then check understanding with a quick question: ask a pupil from the pre-teach group first, since they met these words and ideas before the lesson. Pupils try to recall before you re-explain.
 In 1756 the Nawab of Bengal, Siraj ud-Daulah, attacked the Company's base at Calcutta. He accused the Company of breaking his rules and of not paying the taxes it owed him. The Company sent Robert Clive to Calcutta to defeat the Nawab and secure its position.
-In 1757 Clive faced the Nawab at the Battle of Plassey. Clive had only about 3,000 men; the Nawab had about 40,000, with support from France. But Clive used a divide and rule strategy. In secret, he offered the Nawab's key military officers money and positions of power if they did not fight. Most of the Nawab's soldiers refused to fight, and Clive won easily. Clive then used his victory to make himself rich: your lesson says he took the equivalent of £250 million in today's money from the Nawab and from Bengal, and carried precious jewels back to England.
+In 1757 Clive faced the Nawab at the Battle of Plassey. Clive had only about 3,000 men; the Nawab had about 40,000, with support from France. But Clive used a divide and rule strategy. In secret, he offered the Nawab's key military officers money and positions of power if they did not fight. Most of the Nawab's soldiers refused to fight, and Clive won easily. Clive then used his victory to make himself rich: your lesson says he took from the Nawab and from Bengal the equivalent of £250 million in today's money, and carried precious jewels home to England.
 Plassey was a turning point. The Company officially took control of Bengal and changed from a business focused on trade and profit into the ruler of a large part of India. In 1765 it took charge of all tax collection in Bengal, a job that belongs to rulers, not to private companies. In the years that followed it used its private army and the same divide and rule strategy to take control of most of India. The British Empire in India had begun.
 Worked example — model it step by step, thinking aloud: Explain why India was ‘easy’ to conquer in 1757. Refer to Aurangzeb and to what happened after his death. (1) Point: India was easy to conquer in 1757 because the Mughal Empire that had held it together had collapsed. (2) Evidence: after Aurangzeb died in 1707 his family fought for control, and by 1720 the Empire had broken into smaller states ruled by Nawabs. (3) Explain: a divided India could not unite against the Company, and Clive could use divide and rule, paying the Nawab's own officers not to fight at Plassey. (4) Link: so the Company did not need a huge army; India's division did much of the work for it. Answer: Point, evidence, explain, link: the Mughal collapse after 1707 left India divided into Nawab-ruled states, so the Company could pick them off one at a time and buy off the Nawab's officers at Plassey..
 Tip: Divide and rule appears three times in this unit: Plassey in 1757, the partition of Bengal in 1905, and the use of caste and religion under the Raj. Keep a running list.</a:t>
@@ -1049,7 +1049,7 @@
               <a:rPr lang="en-US" dirty="0"/>
               <a:t>Teach — The Battle of Plassey, 1757: from traders to rulers. Say it in your own words, then check understanding with a quick question: ask a pupil from the pre-teach group first, since they met these words and ideas before the lesson. Pupils try to recall before you re-explain.
 In 1756 the Nawab of Bengal, Siraj ud-Daulah, attacked the Company's base at Calcutta. He accused the Company of breaking his rules and of not paying the taxes it owed him. The Company sent Robert Clive to Calcutta to defeat the Nawab and secure its position.
-In 1757 Clive faced the Nawab at the Battle of Plassey. Clive had only about 3,000 men; the Nawab had about 40,000, with support from France. But Clive used a divide and rule strategy. In secret, he offered the Nawab's key military officers money and positions of power if they did not fight. Most of the Nawab's soldiers refused to fight, and Clive won easily. Clive then used his victory to make himself rich: your lesson says he took the equivalent of £250 million in today's money from the Nawab and from Bengal, and carried precious jewels back to England.
+In 1757 Clive faced the Nawab at the Battle of Plassey. Clive had only about 3,000 men; the Nawab had about 40,000, with support from France. But Clive used a divide and rule strategy. In secret, he offered the Nawab's key military officers money and positions of power if they did not fight. Most of the Nawab's soldiers refused to fight, and Clive won easily. Clive then used his victory to make himself rich: your lesson says he took from the Nawab and from Bengal the equivalent of £250 million in today's money, and carried precious jewels home to England.
 Plassey was a turning point. The Company officially took control of Bengal and changed from a business focused on trade and profit into the ruler of a large part of India. In 1765 it took charge of all tax collection in Bengal, a job that belongs to rulers, not to private companies. In the years that followed it used its private army and the same divide and rule strategy to take control of most of India. The British Empire in India had begun.
 Worked example — model it step by step, thinking aloud: Explain why India was ‘easy’ to conquer in 1757. Refer to Aurangzeb and to what happened after his death. (1) Point: India was easy to conquer in 1757 because the Mughal Empire that had held it together had collapsed. (2) Evidence: after Aurangzeb died in 1707 his family fought for control, and by 1720 the Empire had broken into smaller states ruled by Nawabs. (3) Explain: a divided India could not unite against the Company, and Clive could use divide and rule, paying the Nawab's own officers not to fight at Plassey. (4) Link: so the Company did not need a huge army; India's division did much of the work for it. Answer: Point, evidence, explain, link: the Mughal collapse after 1707 left India divided into Nawab-ruled states, so the Company could pick them off one at a time and buy off the Nawab's officers at Plassey..
 Tip: Divide and rule appears three times in this unit: Plassey in 1757, the partition of Bengal in 1905, and the use of caste and religion under the Raj. Keep a running list.</a:t>
@@ -2541,7 +2541,7 @@
               <a:rPr lang="en-US" dirty="0"/>
               <a:t>Teach — What is an empire, and why did Britain want one?. Say it in your own words, then check understanding with a quick question: ask a pupil from the pre-teach group first, since they met these words and ideas before the lesson. Pupils try to recall before you re-explain.
 An empire is a group of countries and colonies controlled by one powerful country, often called the mother country. A colony is one of those controlled countries. To colonise a place means to send settlers there and take control of it. Your big question for this unit is about change and continuity: how much did the British Empire change India, and what stayed the same? You used the same idea in Year 7 when you judged how much William the Conqueror and the Plantagenets changed England.
-English exploration and empire building did not start properly until the reign of Queen Elizabeth I, from 1558 to 1603. By 1615, England had colonies in North America, English explorers had sailed around the world, and English companies had trading posts in India. By 1750 the British Empire included colonies in North America, West Africa and India.
+English exploration and empire building only began in earnest in the reign of Queen Elizabeth I, from 1558 to 1603. By 1615, England had colonies in North America, ships that had sailed right around the world, and trading posts in India run by English companies. By 1750 the British Empire included colonies in North America, West Africa and India.
 Your lesson gives six reasons why Britain wanted an empire. Resources: colonies gave Britain materials such as cotton and tea to use at home. Strategic reasons: controlling other countries protected Britain's own interests. Weak countries: some lands were easy to conquer because their people had weaker technology or their societies were divided. Trade: new countries meant new customers, which made Britain rich. Competition: European countries raced to have the biggest empire. Religion: some wanted to bring Christianity to people they wrongly called ‘uncivilised’.
 Tip: Learn the six reasons as two groups of three: things Britain wanted to GET (resources, trade, strategic safety) and things Britain wanted to BE (strongest in Europe, a Christian empire, a conqueror of weaker lands).</a:t>
             </a:r>
@@ -18361,7 +18361,7 @@
                 <a:ea typeface="Calibri" pitchFamily="34" charset="-122"/>
                 <a:cs typeface="Calibri" pitchFamily="34" charset="-120"/>
               </a:rPr>
-              <a:t>English exploration and empire building did not start properly until the reign of Queen Elizabeth I, from 1558 to 1603.</a:t>
+              <a:t>English exploration and empire building only began in earnest in the reign of Queen Elizabeth I, from 1558 to 1603.</a:t>
             </a:r>
             <a:endParaRPr lang="en-US" sz="2200" dirty="0"/>
           </a:p>
